--- a/chapter8/parts/part-09-case-studies/clip.pptx
+++ b/chapter8/parts/part-09-case-studies/clip.pptx
@@ -4258,10 +4258,12 @@
           </a:bodyPr>
           <a:lstStyle/>
           <a:p>
-            <a:pPr>
+            <a:pPr lvl="0" marL="457200" indent="-228600">
+              <a:buFont typeface="Calibri"/>
               <a:spcAft>
                 <a:spcPts val="1000"/>
               </a:spcAft>
+              <a:buSzPct val="100000"/>
               <a:buChar char="•"/>
               <a:lnSpc>
                 <a:spcPts val="2200"/>
@@ -4278,10 +4280,12 @@
             </a:r>
           </a:p>
           <a:p>
-            <a:pPr>
+            <a:pPr lvl="0" marL="457200" indent="-228600">
+              <a:buFont typeface="Calibri"/>
               <a:spcAft>
                 <a:spcPts val="1000"/>
               </a:spcAft>
+              <a:buSzPct val="100000"/>
               <a:buChar char="•"/>
               <a:lnSpc>
                 <a:spcPts val="2200"/>
@@ -4298,10 +4302,12 @@
             </a:r>
           </a:p>
           <a:p>
-            <a:pPr>
+            <a:pPr lvl="0" marL="457200" indent="-228600">
+              <a:buFont typeface="Calibri"/>
               <a:spcAft>
                 <a:spcPts val="1000"/>
               </a:spcAft>
+              <a:buSzPct val="100000"/>
               <a:buChar char="•"/>
               <a:lnSpc>
                 <a:spcPts val="2200"/>
@@ -4318,10 +4324,12 @@
             </a:r>
           </a:p>
           <a:p>
-            <a:pPr>
+            <a:pPr lvl="0" marL="457200" indent="-228600">
+              <a:buFont typeface="Calibri"/>
               <a:spcAft>
                 <a:spcPts val="1000"/>
               </a:spcAft>
+              <a:buSzPct val="100000"/>
               <a:buChar char="•"/>
               <a:lnSpc>
                 <a:spcPts val="2200"/>
@@ -4457,10 +4465,12 @@
           </a:bodyPr>
           <a:lstStyle/>
           <a:p>
-            <a:pPr>
+            <a:pPr lvl="0" marL="457200" indent="-228600">
+              <a:buFont typeface="Calibri"/>
               <a:spcAft>
                 <a:spcPts val="1000"/>
               </a:spcAft>
+              <a:buSzPct val="100000"/>
               <a:buChar char="•"/>
               <a:lnSpc>
                 <a:spcPts val="2200"/>
@@ -4477,10 +4487,12 @@
             </a:r>
           </a:p>
           <a:p>
-            <a:pPr>
+            <a:pPr lvl="0" marL="457200" indent="-228600">
+              <a:buFont typeface="Calibri"/>
               <a:spcAft>
                 <a:spcPts val="1000"/>
               </a:spcAft>
+              <a:buSzPct val="100000"/>
               <a:buChar char="•"/>
               <a:lnSpc>
                 <a:spcPts val="2200"/>
@@ -4616,10 +4628,12 @@
           </a:bodyPr>
           <a:lstStyle/>
           <a:p>
-            <a:pPr>
+            <a:pPr lvl="0" marL="457200" indent="-228600">
+              <a:buFont typeface="Calibri"/>
               <a:spcAft>
                 <a:spcPts val="1000"/>
               </a:spcAft>
+              <a:buSzPct val="100000"/>
               <a:buChar char="•"/>
               <a:lnSpc>
                 <a:spcPts val="2200"/>
@@ -4636,10 +4650,12 @@
             </a:r>
           </a:p>
           <a:p>
-            <a:pPr>
+            <a:pPr lvl="0" marL="457200" indent="-228600">
+              <a:buFont typeface="Calibri"/>
               <a:spcAft>
                 <a:spcPts val="1000"/>
               </a:spcAft>
+              <a:buSzPct val="100000"/>
               <a:buChar char="•"/>
               <a:lnSpc>
                 <a:spcPts val="2200"/>
@@ -4775,10 +4791,12 @@
           </a:bodyPr>
           <a:lstStyle/>
           <a:p>
-            <a:pPr>
+            <a:pPr lvl="0" marL="457200" indent="-228600">
+              <a:buFont typeface="Calibri"/>
               <a:spcAft>
                 <a:spcPts val="1000"/>
               </a:spcAft>
+              <a:buSzPct val="100000"/>
               <a:buChar char="•"/>
               <a:lnSpc>
                 <a:spcPts val="2200"/>
@@ -4914,10 +4932,12 @@
           </a:bodyPr>
           <a:lstStyle/>
           <a:p>
-            <a:pPr>
+            <a:pPr lvl="0" marL="457200" indent="-228600">
+              <a:buFont typeface="Calibri"/>
               <a:spcAft>
                 <a:spcPts val="1000"/>
               </a:spcAft>
+              <a:buSzPct val="100000"/>
               <a:buChar char="•"/>
               <a:lnSpc>
                 <a:spcPts val="2200"/>
@@ -4934,10 +4954,12 @@
             </a:r>
           </a:p>
           <a:p>
-            <a:pPr>
+            <a:pPr lvl="0" marL="457200" indent="-228600">
+              <a:buFont typeface="Calibri"/>
               <a:spcAft>
                 <a:spcPts val="1000"/>
               </a:spcAft>
+              <a:buSzPct val="100000"/>
               <a:buChar char="•"/>
               <a:lnSpc>
                 <a:spcPts val="2200"/>
@@ -4954,10 +4976,12 @@
             </a:r>
           </a:p>
           <a:p>
-            <a:pPr>
+            <a:pPr lvl="0" marL="457200" indent="-228600">
+              <a:buFont typeface="Calibri"/>
               <a:spcAft>
                 <a:spcPts val="1000"/>
               </a:spcAft>
+              <a:buSzPct val="100000"/>
               <a:buChar char="•"/>
               <a:lnSpc>
                 <a:spcPts val="2200"/>
@@ -4974,10 +4998,12 @@
             </a:r>
           </a:p>
           <a:p>
-            <a:pPr>
+            <a:pPr lvl="0" marL="457200" indent="-228600">
+              <a:buFont typeface="Calibri"/>
               <a:spcAft>
                 <a:spcPts val="1000"/>
               </a:spcAft>
+              <a:buSzPct val="100000"/>
               <a:buChar char="•"/>
               <a:lnSpc>
                 <a:spcPts val="2200"/>
@@ -5113,10 +5139,12 @@
           </a:bodyPr>
           <a:lstStyle/>
           <a:p>
-            <a:pPr>
+            <a:pPr lvl="0" marL="457200" indent="-228600">
+              <a:buFont typeface="Calibri"/>
               <a:spcAft>
                 <a:spcPts val="1000"/>
               </a:spcAft>
+              <a:buSzPct val="100000"/>
               <a:buChar char="•"/>
               <a:lnSpc>
                 <a:spcPts val="2200"/>
@@ -5133,10 +5161,12 @@
             </a:r>
           </a:p>
           <a:p>
-            <a:pPr>
+            <a:pPr lvl="0" marL="457200" indent="-228600">
+              <a:buFont typeface="Calibri"/>
               <a:spcAft>
                 <a:spcPts val="1000"/>
               </a:spcAft>
+              <a:buSzPct val="100000"/>
               <a:buChar char="•"/>
               <a:lnSpc>
                 <a:spcPts val="2200"/>
@@ -5153,10 +5183,12 @@
             </a:r>
           </a:p>
           <a:p>
-            <a:pPr>
+            <a:pPr lvl="0" marL="457200" indent="-228600">
+              <a:buFont typeface="Calibri"/>
               <a:spcAft>
                 <a:spcPts val="1000"/>
               </a:spcAft>
+              <a:buSzPct val="100000"/>
               <a:buChar char="•"/>
               <a:lnSpc>
                 <a:spcPts val="2200"/>
@@ -5173,10 +5205,12 @@
             </a:r>
           </a:p>
           <a:p>
-            <a:pPr>
+            <a:pPr lvl="0" marL="457200" indent="-228600">
+              <a:buFont typeface="Calibri"/>
               <a:spcAft>
                 <a:spcPts val="1000"/>
               </a:spcAft>
+              <a:buSzPct val="100000"/>
               <a:buChar char="•"/>
               <a:lnSpc>
                 <a:spcPts val="2200"/>
@@ -5193,10 +5227,12 @@
             </a:r>
           </a:p>
           <a:p>
-            <a:pPr>
+            <a:pPr lvl="0" marL="457200" indent="-228600">
+              <a:buFont typeface="Calibri"/>
               <a:spcAft>
                 <a:spcPts val="1000"/>
               </a:spcAft>
+              <a:buSzPct val="100000"/>
               <a:buChar char="•"/>
               <a:lnSpc>
                 <a:spcPts val="2200"/>
@@ -5605,10 +5641,12 @@
           </a:bodyPr>
           <a:lstStyle/>
           <a:p>
-            <a:pPr>
+            <a:pPr lvl="0" marL="457200" indent="-228600">
+              <a:buFont typeface="Calibri"/>
               <a:spcAft>
                 <a:spcPts val="1000"/>
               </a:spcAft>
+              <a:buSzPct val="100000"/>
               <a:buChar char="•"/>
               <a:lnSpc>
                 <a:spcPts val="2200"/>
@@ -5625,10 +5663,12 @@
             </a:r>
           </a:p>
           <a:p>
-            <a:pPr>
+            <a:pPr lvl="0" marL="457200" indent="-228600">
+              <a:buFont typeface="Calibri"/>
               <a:spcAft>
                 <a:spcPts val="1000"/>
               </a:spcAft>
+              <a:buSzPct val="100000"/>
               <a:buChar char="•"/>
               <a:lnSpc>
                 <a:spcPts val="2200"/>
@@ -5645,10 +5685,12 @@
             </a:r>
           </a:p>
           <a:p>
-            <a:pPr>
+            <a:pPr lvl="0" marL="457200" indent="-228600">
+              <a:buFont typeface="Calibri"/>
               <a:spcAft>
                 <a:spcPts val="1000"/>
               </a:spcAft>
+              <a:buSzPct val="100000"/>
               <a:buChar char="•"/>
               <a:lnSpc>
                 <a:spcPts val="2200"/>
@@ -5665,10 +5707,12 @@
             </a:r>
           </a:p>
           <a:p>
-            <a:pPr>
+            <a:pPr lvl="0" marL="457200" indent="-228600">
+              <a:buFont typeface="Calibri"/>
               <a:spcAft>
                 <a:spcPts val="1000"/>
               </a:spcAft>
+              <a:buSzPct val="100000"/>
               <a:buChar char="•"/>
               <a:lnSpc>
                 <a:spcPts val="2200"/>
@@ -5685,10 +5729,12 @@
             </a:r>
           </a:p>
           <a:p>
-            <a:pPr>
+            <a:pPr lvl="0" marL="457200" indent="-228600">
+              <a:buFont typeface="Calibri"/>
               <a:spcAft>
                 <a:spcPts val="1000"/>
               </a:spcAft>
+              <a:buSzPct val="100000"/>
               <a:buChar char="•"/>
               <a:lnSpc>
                 <a:spcPts val="2200"/>
@@ -6002,10 +6048,12 @@
           </a:bodyPr>
           <a:lstStyle/>
           <a:p>
-            <a:pPr>
+            <a:pPr lvl="0" marL="457200" indent="-228600">
+              <a:buFont typeface="Calibri"/>
               <a:spcAft>
                 <a:spcPts val="1000"/>
               </a:spcAft>
+              <a:buSzPct val="100000"/>
               <a:buChar char="•"/>
               <a:lnSpc>
                 <a:spcPts val="2200"/>
@@ -6022,10 +6070,12 @@
             </a:r>
           </a:p>
           <a:p>
-            <a:pPr>
+            <a:pPr lvl="0" marL="457200" indent="-228600">
+              <a:buFont typeface="Calibri"/>
               <a:spcAft>
                 <a:spcPts val="1000"/>
               </a:spcAft>
+              <a:buSzPct val="100000"/>
               <a:buChar char="•"/>
               <a:lnSpc>
                 <a:spcPts val="2200"/>
@@ -6042,10 +6092,12 @@
             </a:r>
           </a:p>
           <a:p>
-            <a:pPr>
+            <a:pPr lvl="0" marL="457200" indent="-228600">
+              <a:buFont typeface="Calibri"/>
               <a:spcAft>
                 <a:spcPts val="1000"/>
               </a:spcAft>
+              <a:buSzPct val="100000"/>
               <a:buChar char="•"/>
               <a:lnSpc>
                 <a:spcPts val="2200"/>
@@ -6062,10 +6114,12 @@
             </a:r>
           </a:p>
           <a:p>
-            <a:pPr>
+            <a:pPr lvl="0" marL="457200" indent="-228600">
+              <a:buFont typeface="Calibri"/>
               <a:spcAft>
                 <a:spcPts val="1000"/>
               </a:spcAft>
+              <a:buSzPct val="100000"/>
               <a:buChar char="•"/>
               <a:lnSpc>
                 <a:spcPts val="2200"/>
@@ -6082,10 +6136,12 @@
             </a:r>
           </a:p>
           <a:p>
-            <a:pPr>
+            <a:pPr lvl="0" marL="457200" indent="-228600">
+              <a:buFont typeface="Calibri"/>
               <a:spcAft>
                 <a:spcPts val="1000"/>
               </a:spcAft>
+              <a:buSzPct val="100000"/>
               <a:buChar char="•"/>
               <a:lnSpc>
                 <a:spcPts val="2200"/>
